--- a/deck/AIS-42_PS-4B.pptx
+++ b/deck/AIS-42_PS-4B.pptx
@@ -4698,7 +4698,7 @@
                   <a:srgbClr val="E8EEFC"/>
                 </a:solidFill>
               </a:rPr>
-              <a:t>Flask API + SQLite — 17 endpoints: optimize · SOS · sync · dispatch · track · DHS · HeiGIT</a:t>
+              <a:t>Flask API + SQLite — 22 endpoints: optimize · SOS · sync · dispatch · supply-route · intel · DHS · HeiGIT</a:t>
             </a:r>
           </a:p>
           <a:p>
@@ -5673,7 +5673,7 @@
                   <a:srgbClr val="E8EEFC"/>
                 </a:solidFill>
               </a:rPr>
-              <a:t>30-min emergency coverage: 13.82% → 15.09% with 3 MMUs — the gap is bridged by dispatch modes</a:t>
+              <a:t>30-min emergency coverage: 13.82% → 15.69% with 3 MMUs — the gap is bridged by dispatch modes</a:t>
             </a:r>
           </a:p>
           <a:p>

--- a/deck/AIS-42_PS-4B.pptx
+++ b/deck/AIS-42_PS-4B.pptx
@@ -5673,7 +5673,7 @@
                   <a:srgbClr val="E8EEFC"/>
                 </a:solidFill>
               </a:rPr>
-              <a:t>30-min emergency coverage: 13.82% → 15.69% with 3 MMUs — the gap is bridged by dispatch modes</a:t>
+              <a:t>30-min emergency coverage: 13.82% → 15.09% with 3 MMUs — the gap is bridged by dispatch modes</a:t>
             </a:r>
           </a:p>
           <a:p>

--- a/deck/AIS-42_PS-4B.pptx
+++ b/deck/AIS-42_PS-4B.pptx
@@ -3753,7 +3753,22 @@
                   <a:srgbClr val="22D3A7"/>
                 </a:solidFill>
               </a:rPr>
-              <a:t>Every percentage point of coverage = millions of people</a:t>
+              <a:t>14.75M people newly served = ~2.1 billion person-minutes of travel saved per year</a:t>
+            </a:r>
+          </a:p>
+          <a:p>
+            <a:pPr algn="l">
+              <a:spcAft>
+                <a:spcPts val="800"/>
+              </a:spcAft>
+            </a:pPr>
+            <a:r>
+              <a:rPr sz="1800" b="0">
+                <a:solidFill>
+                  <a:srgbClr val="8EA0C0"/>
+                </a:solidFill>
+              </a:rPr>
+              <a:t>Operated by block health offices under existing NHM Mobile Medical Unit guidelines</a:t>
             </a:r>
           </a:p>
         </p:txBody>

--- a/deck/AIS-42_PS-4B.pptx
+++ b/deck/AIS-42_PS-4B.pptx
@@ -3470,7 +3470,7 @@
                   <a:srgbClr val="E8EEFC"/>
                 </a:solidFill>
               </a:rPr>
-              <a:t>🚑 Ambulance (60 km/h) · 🚐 MMU Van (40) · 🏍️ 2W Rider (30) · 🚁 UAV (120) · ⛺ Mobile Outpost</a:t>
+              <a:t>🚑 Ambulance (60 km/h) · 🚐 MMU Van (40) · 🏍️ 2W Rider (30) · 🚴 Bike Medic (35) · 🛩️ UAV (120) · 🚁 Helicopter (200) · ⛺ Outpost</a:t>
             </a:r>
           </a:p>
           <a:p>
